--- a/assets/powerpoints/module-n2-autobus/C2-lire-un-horaire-lire-un-avis.pptx
+++ b/assets/powerpoints/module-n2-autobus/C2-lire-un-horaire-lire-un-avis.pptx
@@ -9614,7 +9614,25 @@
                 </a:solidFill>
                 <a:latin typeface="Verdana"/>
               </a:rPr>
-              <a:t>On la demande ou on la prend en montant, et on la &lt;b&gt;garde&lt;/b&gt;. Sans elle, il faut payer une deuxième fois.</a:t>
+              <a:t>On la demande ou on la prend en montant, et on la </a:t>
+            </a:r>
+            <a:r>
+              <a:rPr sz="2000" b="1" i="0">
+                <a:solidFill>
+                  <a:srgbClr val="4B4F52"/>
+                </a:solidFill>
+                <a:latin typeface="Verdana"/>
+              </a:rPr>
+              <a:t>garde</a:t>
+            </a:r>
+            <a:r>
+              <a:rPr sz="2000" b="0" i="0">
+                <a:solidFill>
+                  <a:srgbClr val="4B4F52"/>
+                </a:solidFill>
+                <a:latin typeface="Verdana"/>
+              </a:rPr>
+              <a:t>. Sans elle, il faut payer une deuxième fois.</a:t>
             </a:r>
           </a:p>
         </p:txBody>
